--- a/submission/Medreach-Hackathon-Presentation.pptx
+++ b/submission/Medreach-Hackathon-Presentation.pptx
@@ -2804,7 +2804,7 @@
                   <a:srgbClr val="99F6E4"/>
                 </a:solidFill>
               </a:rPr>
-              <a:t>Live demo: medreach-wtne.onrender.com   ·   Code: github.com/prakharporwal518-collab/Medreach</a:t>
+              <a:t>Live demo: medreach-2.onrender.com   ·   Code: github.com/prakharporwal518-collab/Medreach</a:t>
             </a:r>
             <a:endParaRPr lang="en-US" sz="1300" dirty="0"/>
           </a:p>
@@ -4048,7 +4048,7 @@
                   <a:srgbClr val="99F6E4"/>
                 </a:solidFill>
               </a:rPr>
-              <a:t>medreach-wtne.onrender.com</a:t>
+              <a:t>medreach-2.onrender.com</a:t>
             </a:r>
             <a:pPr indent="0" marL="0">
               <a:buNone/>
